--- a/ai_engine/gen/templates/academic.pptx
+++ b/ai_engine/gen/templates/academic.pptx
@@ -9,6 +9,7 @@
     <p:sldId id="257" r:id="rId8"/>
     <p:sldId id="258" r:id="rId9"/>
     <p:sldId id="259" r:id="rId10"/>
+    <p:sldId id="260" r:id="rId11"/>
   </p:sldIdLst>
   <p:sldSz cx="12191999" cy="6858000" type="screen4x3"/>
   <p:notesSz cx="6858000" cy="9144000"/>
@@ -4487,6 +4488,467 @@
             </a:pPr>
             <a:r>
               <a:t>4</a:t>
+            </a:r>
+          </a:p>
+        </p:txBody>
+      </p:sp>
+      <p:sp>
+        <p:nvSpPr>
+          <p:cNvPr id="3" name="TextBox 2"/>
+          <p:cNvSpPr txBox="1"/>
+          <p:nvPr/>
+        </p:nvSpPr>
+        <p:spPr>
+          <a:xfrm>
+            <a:off x="685800" y="365760"/>
+            <a:ext cx="2011680" cy="219456"/>
+          </a:xfrm>
+          <a:prstGeom prst="rect">
+            <a:avLst/>
+          </a:prstGeom>
+          <a:noFill/>
+        </p:spPr>
+        <p:txBody>
+          <a:bodyPr wrap="square" anchor="t" lIns="18288" rIns="18288" tIns="9144" bIns="9144">
+            <a:noAutofit/>
+          </a:bodyPr>
+          <a:lstStyle/>
+          <a:p>
+            <a:pPr algn="l">
+              <a:defRPr sz="1000" b="1">
+                <a:solidFill>
+                  <a:srgbClr val="B9975B"/>
+                </a:solidFill>
+                <a:latin typeface="Microsoft YaHei"/>
+              </a:defRPr>
+            </a:pPr>
+            <a:r>
+              <a:t>TWO COLUMN</a:t>
+            </a:r>
+          </a:p>
+        </p:txBody>
+      </p:sp>
+      <p:sp>
+        <p:nvSpPr>
+          <p:cNvPr id="4" name="TextBox 3"/>
+          <p:cNvSpPr txBox="1"/>
+          <p:nvPr/>
+        </p:nvSpPr>
+        <p:spPr>
+          <a:xfrm>
+            <a:off x="658368" y="640080"/>
+            <a:ext cx="10744200" cy="512064"/>
+          </a:xfrm>
+          <a:prstGeom prst="rect">
+            <a:avLst/>
+          </a:prstGeom>
+          <a:noFill/>
+        </p:spPr>
+        <p:txBody>
+          <a:bodyPr wrap="square" anchor="t" lIns="18288" rIns="18288" tIns="9144" bIns="9144">
+            <a:noAutofit/>
+          </a:bodyPr>
+          <a:lstStyle/>
+          <a:p>
+            <a:pPr algn="l">
+              <a:defRPr sz="3400" b="1">
+                <a:solidFill>
+                  <a:srgbClr val="17263B"/>
+                </a:solidFill>
+                <a:latin typeface="Microsoft YaHei"/>
+              </a:defRPr>
+            </a:pPr>
+            <a:r>
+              <a:t>双栏讲授</a:t>
+            </a:r>
+          </a:p>
+        </p:txBody>
+      </p:sp>
+      <p:sp>
+        <p:nvSpPr>
+          <p:cNvPr id="5" name="Rectangle 4"/>
+          <p:cNvSpPr/>
+          <p:nvPr/>
+        </p:nvSpPr>
+        <p:spPr>
+          <a:xfrm>
+            <a:off x="658368" y="1161288"/>
+            <a:ext cx="10863072" cy="18288"/>
+          </a:xfrm>
+          <a:prstGeom prst="rect">
+            <a:avLst/>
+          </a:prstGeom>
+          <a:solidFill>
+            <a:srgbClr val="315B7D"/>
+          </a:solidFill>
+          <a:ln>
+            <a:noFill/>
+          </a:ln>
+        </p:spPr>
+        <p:style>
+          <a:lnRef idx="1">
+            <a:schemeClr val="accent1"/>
+          </a:lnRef>
+          <a:fillRef idx="3">
+            <a:schemeClr val="accent1"/>
+          </a:fillRef>
+          <a:effectRef idx="2">
+            <a:schemeClr val="accent1"/>
+          </a:effectRef>
+          <a:fontRef idx="minor">
+            <a:schemeClr val="lt1"/>
+          </a:fontRef>
+        </p:style>
+        <p:txBody>
+          <a:bodyPr rtlCol="0" anchor="ctr"/>
+          <a:lstStyle/>
+          <a:p>
+            <a:pPr algn="ctr"/>
+          </a:p>
+        </p:txBody>
+      </p:sp>
+      <p:sp>
+        <p:nvSpPr>
+          <p:cNvPr id="6" name="Rounded Rectangle 5"/>
+          <p:cNvSpPr/>
+          <p:nvPr/>
+        </p:nvSpPr>
+        <p:spPr>
+          <a:xfrm>
+            <a:off x="658368" y="1298448"/>
+            <a:ext cx="5102352" cy="4892040"/>
+          </a:xfrm>
+          <a:prstGeom prst="roundRect">
+            <a:avLst/>
+          </a:prstGeom>
+          <a:solidFill>
+            <a:srgbClr val="FFFFFF"/>
+          </a:solidFill>
+          <a:ln>
+            <a:solidFill>
+              <a:srgbClr val="667284"/>
+            </a:solidFill>
+          </a:ln>
+        </p:spPr>
+        <p:style>
+          <a:lnRef idx="1">
+            <a:schemeClr val="accent1"/>
+          </a:lnRef>
+          <a:fillRef idx="3">
+            <a:schemeClr val="accent1"/>
+          </a:fillRef>
+          <a:effectRef idx="2">
+            <a:schemeClr val="accent1"/>
+          </a:effectRef>
+          <a:fontRef idx="minor">
+            <a:schemeClr val="lt1"/>
+          </a:fontRef>
+        </p:style>
+        <p:txBody>
+          <a:bodyPr rtlCol="0" anchor="ctr"/>
+          <a:lstStyle/>
+          <a:p>
+            <a:pPr algn="ctr"/>
+          </a:p>
+        </p:txBody>
+      </p:sp>
+      <p:sp>
+        <p:nvSpPr>
+          <p:cNvPr id="7" name="TextBox 6"/>
+          <p:cNvSpPr txBox="1"/>
+          <p:nvPr/>
+        </p:nvSpPr>
+        <p:spPr>
+          <a:xfrm>
+            <a:off x="914400" y="1463039"/>
+            <a:ext cx="4590288" cy="329184"/>
+          </a:xfrm>
+          <a:prstGeom prst="rect">
+            <a:avLst/>
+          </a:prstGeom>
+          <a:noFill/>
+        </p:spPr>
+        <p:txBody>
+          <a:bodyPr wrap="square" anchor="t" lIns="18288" rIns="18288" tIns="9144" bIns="9144">
+            <a:noAutofit/>
+          </a:bodyPr>
+          <a:lstStyle/>
+          <a:p>
+            <a:pPr algn="l">
+              <a:defRPr sz="1500" b="1">
+                <a:solidFill>
+                  <a:srgbClr val="315B7D"/>
+                </a:solidFill>
+                <a:latin typeface="Microsoft YaHei"/>
+              </a:defRPr>
+            </a:pPr>
+            <a:r>
+              <a:t>核心要点</a:t>
+            </a:r>
+          </a:p>
+        </p:txBody>
+      </p:sp>
+      <p:sp>
+        <p:nvSpPr>
+          <p:cNvPr id="8" name="TextBox 7"/>
+          <p:cNvSpPr txBox="1"/>
+          <p:nvPr/>
+        </p:nvSpPr>
+        <p:spPr>
+          <a:xfrm>
+            <a:off x="905256" y="1920240"/>
+            <a:ext cx="4608576" cy="4069079"/>
+          </a:xfrm>
+          <a:prstGeom prst="rect">
+            <a:avLst/>
+          </a:prstGeom>
+          <a:noFill/>
+        </p:spPr>
+        <p:txBody>
+          <a:bodyPr wrap="square" lIns="27432" rIns="27432" tIns="18288" bIns="18288">
+            <a:noAutofit/>
+          </a:bodyPr>
+          <a:lstStyle/>
+          <a:p>
+            <a:pPr>
+              <a:lnSpc>
+                <a:spcPct val="113000"/>
+              </a:lnSpc>
+              <a:spcAft>
+                <a:spcPts val="700"/>
+              </a:spcAft>
+              <a:defRPr sz="1800">
+                <a:solidFill>
+                  <a:srgbClr val="17263B"/>
+                </a:solidFill>
+                <a:latin typeface="SimSun"/>
+              </a:defRPr>
+            </a:pPr>
+            <a:r>
+              <a:t>• 要点｜左栏聚焦核心结论</a:t>
+            </a:r>
+          </a:p>
+          <a:p>
+            <a:pPr>
+              <a:lnSpc>
+                <a:spcPct val="113000"/>
+              </a:lnSpc>
+              <a:spcAft>
+                <a:spcPts val="700"/>
+              </a:spcAft>
+              <a:defRPr sz="1800">
+                <a:solidFill>
+                  <a:srgbClr val="17263B"/>
+                </a:solidFill>
+                <a:latin typeface="SimSun"/>
+              </a:defRPr>
+            </a:pPr>
+            <a:r>
+              <a:t>• 要点｜要点保持可快速扫描</a:t>
+            </a:r>
+          </a:p>
+        </p:txBody>
+      </p:sp>
+      <p:sp>
+        <p:nvSpPr>
+          <p:cNvPr id="9" name="Rounded Rectangle 8"/>
+          <p:cNvSpPr/>
+          <p:nvPr/>
+        </p:nvSpPr>
+        <p:spPr>
+          <a:xfrm>
+            <a:off x="6144768" y="1298448"/>
+            <a:ext cx="5376672" cy="4892040"/>
+          </a:xfrm>
+          <a:prstGeom prst="roundRect">
+            <a:avLst/>
+          </a:prstGeom>
+          <a:solidFill>
+            <a:srgbClr val="FFFFFF"/>
+          </a:solidFill>
+          <a:ln>
+            <a:solidFill>
+              <a:srgbClr val="667284"/>
+            </a:solidFill>
+          </a:ln>
+        </p:spPr>
+        <p:style>
+          <a:lnRef idx="1">
+            <a:schemeClr val="accent1"/>
+          </a:lnRef>
+          <a:fillRef idx="3">
+            <a:schemeClr val="accent1"/>
+          </a:fillRef>
+          <a:effectRef idx="2">
+            <a:schemeClr val="accent1"/>
+          </a:effectRef>
+          <a:fontRef idx="minor">
+            <a:schemeClr val="lt1"/>
+          </a:fontRef>
+        </p:style>
+        <p:txBody>
+          <a:bodyPr rtlCol="0" anchor="ctr"/>
+          <a:lstStyle/>
+          <a:p>
+            <a:pPr algn="ctr"/>
+          </a:p>
+        </p:txBody>
+      </p:sp>
+      <p:sp>
+        <p:nvSpPr>
+          <p:cNvPr id="10" name="TextBox 9"/>
+          <p:cNvSpPr txBox="1"/>
+          <p:nvPr/>
+        </p:nvSpPr>
+        <p:spPr>
+          <a:xfrm>
+            <a:off x="6400800" y="1463039"/>
+            <a:ext cx="4864608" cy="329184"/>
+          </a:xfrm>
+          <a:prstGeom prst="rect">
+            <a:avLst/>
+          </a:prstGeom>
+          <a:noFill/>
+        </p:spPr>
+        <p:txBody>
+          <a:bodyPr wrap="square" anchor="t" lIns="18288" rIns="18288" tIns="9144" bIns="9144">
+            <a:noAutofit/>
+          </a:bodyPr>
+          <a:lstStyle/>
+          <a:p>
+            <a:pPr algn="l">
+              <a:defRPr sz="1500" b="1">
+                <a:solidFill>
+                  <a:srgbClr val="315B7D"/>
+                </a:solidFill>
+                <a:latin typeface="Microsoft YaHei"/>
+              </a:defRPr>
+            </a:pPr>
+            <a:r>
+              <a:t>讲授分段</a:t>
+            </a:r>
+          </a:p>
+        </p:txBody>
+      </p:sp>
+      <p:sp>
+        <p:nvSpPr>
+          <p:cNvPr id="11" name="TextBox 10"/>
+          <p:cNvSpPr txBox="1"/>
+          <p:nvPr/>
+        </p:nvSpPr>
+        <p:spPr>
+          <a:xfrm>
+            <a:off x="6391656" y="1920240"/>
+            <a:ext cx="4882896" cy="4069079"/>
+          </a:xfrm>
+          <a:prstGeom prst="rect">
+            <a:avLst/>
+          </a:prstGeom>
+          <a:noFill/>
+        </p:spPr>
+        <p:txBody>
+          <a:bodyPr wrap="square" lIns="27432" rIns="27432" tIns="18288" bIns="18288">
+            <a:noAutofit/>
+          </a:bodyPr>
+          <a:lstStyle/>
+          <a:p>
+            <a:pPr>
+              <a:lnSpc>
+                <a:spcPct val="113000"/>
+              </a:lnSpc>
+              <a:spcAft>
+                <a:spcPts val="700"/>
+              </a:spcAft>
+              <a:defRPr sz="1800">
+                <a:solidFill>
+                  <a:srgbClr val="17263B"/>
+                </a:solidFill>
+                <a:latin typeface="SimSun"/>
+              </a:defRPr>
+            </a:pPr>
+            <a:r>
+              <a:t>讲解 · 1分钟｜右栏呈现讲授分段与时长。</a:t>
+            </a:r>
+          </a:p>
+          <a:p>
+            <a:pPr>
+              <a:lnSpc>
+                <a:spcPct val="113000"/>
+              </a:lnSpc>
+              <a:spcAft>
+                <a:spcPts val="700"/>
+              </a:spcAft>
+              <a:defRPr sz="1800">
+                <a:solidFill>
+                  <a:srgbClr val="17263B"/>
+                </a:solidFill>
+                <a:latin typeface="SimSun"/>
+              </a:defRPr>
+            </a:pPr>
+            <a:r>
+              <a:t>互动 · 45秒｜以问题检验学生理解。</a:t>
+            </a:r>
+          </a:p>
+        </p:txBody>
+      </p:sp>
+    </p:spTree>
+  </p:cSld>
+  <p:clrMapOvr>
+    <a:masterClrMapping/>
+  </p:clrMapOvr>
+</p:sld>
+</file>
+
+<file path=ppt/slides/slide5.xml><?xml version="1.0" encoding="utf-8"?>
+<p:sld xmlns:a="http://schemas.openxmlformats.org/drawingml/2006/main" xmlns:p="http://schemas.openxmlformats.org/presentationml/2006/main" xmlns:r="http://schemas.openxmlformats.org/officeDocument/2006/relationships">
+  <p:cSld>
+    <p:bg>
+      <p:bgPr>
+        <a:solidFill>
+          <a:srgbClr val="F5F3EE"/>
+        </a:solidFill>
+        <a:effectLst/>
+      </p:bgPr>
+    </p:bg>
+    <p:spTree>
+      <p:nvGrpSpPr>
+        <p:cNvPr id="1" name=""/>
+        <p:cNvGrpSpPr/>
+        <p:nvPr/>
+      </p:nvGrpSpPr>
+      <p:grpSpPr/>
+      <p:sp>
+        <p:nvSpPr>
+          <p:cNvPr id="2" name="TextBox 1"/>
+          <p:cNvSpPr txBox="1"/>
+          <p:nvPr/>
+        </p:nvSpPr>
+        <p:spPr>
+          <a:xfrm>
+            <a:off x="11292840" y="6446520"/>
+            <a:ext cx="411480" cy="201168"/>
+          </a:xfrm>
+          <a:prstGeom prst="rect">
+            <a:avLst/>
+          </a:prstGeom>
+          <a:noFill/>
+        </p:spPr>
+        <p:txBody>
+          <a:bodyPr wrap="square" anchor="t" lIns="18288" rIns="18288" tIns="9144" bIns="9144">
+            <a:noAutofit/>
+          </a:bodyPr>
+          <a:lstStyle/>
+          <a:p>
+            <a:pPr algn="r">
+              <a:defRPr sz="900" b="0">
+                <a:solidFill>
+                  <a:srgbClr val="667284"/>
+                </a:solidFill>
+                <a:latin typeface="SimSun"/>
+              </a:defRPr>
+            </a:pPr>
+            <a:r>
+              <a:t>5</a:t>
             </a:r>
           </a:p>
         </p:txBody>
